--- a/docs/Air_Quality_Prediction_Review_1.pptx
+++ b/docs/Air_Quality_Prediction_Review_1.pptx
@@ -5290,7 +5290,7 @@
                         </a:defRPr>
                       </a:pPr>
                       <a:r>
-                        <a:t>Linear Regression</a:t>
+                        <a:t>XGBoost</a:t>
                       </a:r>
                     </a:p>
                   </a:txBody>
@@ -5313,7 +5313,7 @@
                         </a:defRPr>
                       </a:pPr>
                       <a:r>
-                        <a:t>15.51</a:t>
+                        <a:t>12.35</a:t>
                       </a:r>
                     </a:p>
                   </a:txBody>
@@ -5336,7 +5336,7 @@
                         </a:defRPr>
                       </a:pPr>
                       <a:r>
-                        <a:t>20.07</a:t>
+                        <a:t>16.02</a:t>
                       </a:r>
                     </a:p>
                   </a:txBody>
@@ -5359,7 +5359,7 @@
                         </a:defRPr>
                       </a:pPr>
                       <a:r>
-                        <a:t>0.7005</a:t>
+                        <a:t>0.8090</a:t>
                       </a:r>
                     </a:p>
                   </a:txBody>
@@ -5382,7 +5382,7 @@
                         </a:defRPr>
                       </a:pPr>
                       <a:r>
-                        <a:t>13.90%</a:t>
+                        <a:t>9.52%</a:t>
                       </a:r>
                     </a:p>
                   </a:txBody>
@@ -5405,7 +5405,7 @@
                         </a:defRPr>
                       </a:pPr>
                       <a:r>
-                        <a:t>76.5%</a:t>
+                        <a:t>78.5%</a:t>
                       </a:r>
                     </a:p>
                   </a:txBody>
@@ -7985,7 +7985,7 @@
               </a:defRPr>
             </a:pPr>
             <a:r>
-              <a:t>Benchmark against Linear Regression and Random Forest using MAE, RMSE, R² score, and Category Accuracy.</a:t>
+              <a:t>Benchmark against Random Forest and XGBoost using MAE, RMSE, R² score, and Category Accuracy.</a:t>
             </a:r>
           </a:p>
         </p:txBody>
